--- a/workshop.pptx
+++ b/workshop.pptx
@@ -6288,7 +6288,7 @@
               <a:rPr>
                 <a:latin typeface="Courier"/>
               </a:rPr>
-              <a:t>mkdir logs
+              <a:t>mkdir -p logs
 cat zenodo.json\
  | preston track --algo md5 --data-dir logs/data\
  | preston zenodo --algo md5 --data-dir logs/data \
